--- a/mlops_on_hpc.pptx
+++ b/mlops_on_hpc.pptx
@@ -441,7 +441,7 @@
           <a:p>
             <a:fld id="{8BC644CB-8FFF-4F59-B04D-9A1D2A5DB720}" type="datetimeFigureOut">
               <a:rPr lang="LID4096" smtClean="0"/>
-              <a:t>08/04/2025</a:t>
+              <a:t>12/02/2025</a:t>
             </a:fld>
             <a:endParaRPr lang="LID4096"/>
           </a:p>
@@ -858,7 +858,7 @@
           <a:p>
             <a:fld id="{29DC7A01-813B-4B59-A1CC-F2D63921E46A}" type="datetime1">
               <a:rPr lang="LID4096" smtClean="0"/>
-              <a:t>08/04/2025</a:t>
+              <a:t>12/02/2025</a:t>
             </a:fld>
             <a:endParaRPr lang="LID4096"/>
           </a:p>
@@ -1058,7 +1058,7 @@
           <a:p>
             <a:fld id="{6C2A7740-B6F2-4CC5-9AD0-B161B943DB10}" type="datetime1">
               <a:rPr lang="LID4096" smtClean="0"/>
-              <a:t>08/04/2025</a:t>
+              <a:t>12/02/2025</a:t>
             </a:fld>
             <a:endParaRPr lang="LID4096"/>
           </a:p>
@@ -1268,7 +1268,7 @@
           <a:p>
             <a:fld id="{2F94B025-8F26-4EDF-B991-413B82D6446E}" type="datetime1">
               <a:rPr lang="LID4096" smtClean="0"/>
-              <a:t>08/04/2025</a:t>
+              <a:t>12/02/2025</a:t>
             </a:fld>
             <a:endParaRPr lang="LID4096"/>
           </a:p>
@@ -1468,7 +1468,7 @@
           <a:p>
             <a:fld id="{CB5C8B8A-B2CE-4D78-88A4-476B2363B71E}" type="datetime1">
               <a:rPr lang="LID4096" smtClean="0"/>
-              <a:t>08/04/2025</a:t>
+              <a:t>12/02/2025</a:t>
             </a:fld>
             <a:endParaRPr lang="LID4096"/>
           </a:p>
@@ -1744,7 +1744,7 @@
           <a:p>
             <a:fld id="{CDDAB553-EE67-480E-BCE3-F64D7D51D294}" type="datetime1">
               <a:rPr lang="LID4096" smtClean="0"/>
-              <a:t>08/04/2025</a:t>
+              <a:t>12/02/2025</a:t>
             </a:fld>
             <a:endParaRPr lang="LID4096"/>
           </a:p>
@@ -2012,7 +2012,7 @@
           <a:p>
             <a:fld id="{CD270038-A599-4345-BE24-96A4E06BF8E3}" type="datetime1">
               <a:rPr lang="LID4096" smtClean="0"/>
-              <a:t>08/04/2025</a:t>
+              <a:t>12/02/2025</a:t>
             </a:fld>
             <a:endParaRPr lang="LID4096"/>
           </a:p>
@@ -2427,7 +2427,7 @@
           <a:p>
             <a:fld id="{44A719F7-59BE-4FD1-8AC5-F7BFCCA290D7}" type="datetime1">
               <a:rPr lang="LID4096" smtClean="0"/>
-              <a:t>08/04/2025</a:t>
+              <a:t>12/02/2025</a:t>
             </a:fld>
             <a:endParaRPr lang="LID4096"/>
           </a:p>
@@ -2569,7 +2569,7 @@
           <a:p>
             <a:fld id="{B4C93A37-6A61-4F10-A100-9676ACB86039}" type="datetime1">
               <a:rPr lang="LID4096" smtClean="0"/>
-              <a:t>08/04/2025</a:t>
+              <a:t>12/02/2025</a:t>
             </a:fld>
             <a:endParaRPr lang="LID4096"/>
           </a:p>
@@ -2682,7 +2682,7 @@
           <a:p>
             <a:fld id="{9E73F7F9-09CC-4C21-BDB8-90E2F1A013BD}" type="datetime1">
               <a:rPr lang="LID4096" smtClean="0"/>
-              <a:t>08/04/2025</a:t>
+              <a:t>12/02/2025</a:t>
             </a:fld>
             <a:endParaRPr lang="LID4096"/>
           </a:p>
@@ -2995,7 +2995,7 @@
           <a:p>
             <a:fld id="{FD166AE6-E2E5-4774-8434-34F2AD9BDDCE}" type="datetime1">
               <a:rPr lang="LID4096" smtClean="0"/>
-              <a:t>08/04/2025</a:t>
+              <a:t>12/02/2025</a:t>
             </a:fld>
             <a:endParaRPr lang="LID4096"/>
           </a:p>
@@ -3284,7 +3284,7 @@
           <a:p>
             <a:fld id="{895E2CCE-BBFE-4BEC-9002-70F26B158681}" type="datetime1">
               <a:rPr lang="LID4096" smtClean="0"/>
-              <a:t>08/04/2025</a:t>
+              <a:t>12/02/2025</a:t>
             </a:fld>
             <a:endParaRPr lang="LID4096"/>
           </a:p>
@@ -3527,7 +3527,7 @@
           <a:p>
             <a:fld id="{C795C0FD-7BB7-48C9-86F3-9771767F1BC3}" type="datetime1">
               <a:rPr lang="LID4096" smtClean="0"/>
-              <a:t>08/04/2025</a:t>
+              <a:t>12/02/2025</a:t>
             </a:fld>
             <a:endParaRPr lang="LID4096"/>
           </a:p>
@@ -7003,10 +7003,10 @@
         </p:nvGrpSpPr>
         <p:grpSpPr>
           <a:xfrm>
-            <a:off x="5105400" y="3577286"/>
-            <a:ext cx="6978349" cy="1004270"/>
-            <a:chOff x="-2074887" y="5501785"/>
-            <a:chExt cx="9616659" cy="1135701"/>
+            <a:off x="6389914" y="3428998"/>
+            <a:ext cx="5693835" cy="517618"/>
+            <a:chOff x="-304736" y="5334092"/>
+            <a:chExt cx="7846508" cy="585360"/>
           </a:xfrm>
         </p:grpSpPr>
         <p:sp>
@@ -7144,9 +7144,9 @@
             <p:nvPr/>
           </p:nvCxnSpPr>
           <p:spPr>
-            <a:xfrm flipH="1">
-              <a:off x="-2074887" y="5710619"/>
-              <a:ext cx="4158446" cy="926867"/>
+            <a:xfrm flipH="1" flipV="1">
+              <a:off x="-304736" y="5334092"/>
+              <a:ext cx="2388295" cy="376526"/>
             </a:xfrm>
             <a:prstGeom prst="straightConnector1">
               <a:avLst/>
@@ -23545,7 +23545,7 @@
           <a:p>
             <a:r>
               <a:rPr lang="en-US" dirty="0"/>
-              <a:t>Rename experiment</a:t>
+              <a:t>Remove experiment</a:t>
             </a:r>
             <a:endParaRPr lang="LID4096" dirty="0"/>
           </a:p>

--- a/mlops_on_hpc.pptx
+++ b/mlops_on_hpc.pptx
@@ -441,7 +441,7 @@
           <a:p>
             <a:fld id="{8BC644CB-8FFF-4F59-B04D-9A1D2A5DB720}" type="datetimeFigureOut">
               <a:rPr lang="LID4096" smtClean="0"/>
-              <a:t>12/02/2025</a:t>
+              <a:t>12/03/2025</a:t>
             </a:fld>
             <a:endParaRPr lang="LID4096"/>
           </a:p>
@@ -858,7 +858,7 @@
           <a:p>
             <a:fld id="{29DC7A01-813B-4B59-A1CC-F2D63921E46A}" type="datetime1">
               <a:rPr lang="LID4096" smtClean="0"/>
-              <a:t>12/02/2025</a:t>
+              <a:t>12/03/2025</a:t>
             </a:fld>
             <a:endParaRPr lang="LID4096"/>
           </a:p>
@@ -1058,7 +1058,7 @@
           <a:p>
             <a:fld id="{6C2A7740-B6F2-4CC5-9AD0-B161B943DB10}" type="datetime1">
               <a:rPr lang="LID4096" smtClean="0"/>
-              <a:t>12/02/2025</a:t>
+              <a:t>12/03/2025</a:t>
             </a:fld>
             <a:endParaRPr lang="LID4096"/>
           </a:p>
@@ -1268,7 +1268,7 @@
           <a:p>
             <a:fld id="{2F94B025-8F26-4EDF-B991-413B82D6446E}" type="datetime1">
               <a:rPr lang="LID4096" smtClean="0"/>
-              <a:t>12/02/2025</a:t>
+              <a:t>12/03/2025</a:t>
             </a:fld>
             <a:endParaRPr lang="LID4096"/>
           </a:p>
@@ -1468,7 +1468,7 @@
           <a:p>
             <a:fld id="{CB5C8B8A-B2CE-4D78-88A4-476B2363B71E}" type="datetime1">
               <a:rPr lang="LID4096" smtClean="0"/>
-              <a:t>12/02/2025</a:t>
+              <a:t>12/03/2025</a:t>
             </a:fld>
             <a:endParaRPr lang="LID4096"/>
           </a:p>
@@ -1744,7 +1744,7 @@
           <a:p>
             <a:fld id="{CDDAB553-EE67-480E-BCE3-F64D7D51D294}" type="datetime1">
               <a:rPr lang="LID4096" smtClean="0"/>
-              <a:t>12/02/2025</a:t>
+              <a:t>12/03/2025</a:t>
             </a:fld>
             <a:endParaRPr lang="LID4096"/>
           </a:p>
@@ -2012,7 +2012,7 @@
           <a:p>
             <a:fld id="{CD270038-A599-4345-BE24-96A4E06BF8E3}" type="datetime1">
               <a:rPr lang="LID4096" smtClean="0"/>
-              <a:t>12/02/2025</a:t>
+              <a:t>12/03/2025</a:t>
             </a:fld>
             <a:endParaRPr lang="LID4096"/>
           </a:p>
@@ -2427,7 +2427,7 @@
           <a:p>
             <a:fld id="{44A719F7-59BE-4FD1-8AC5-F7BFCCA290D7}" type="datetime1">
               <a:rPr lang="LID4096" smtClean="0"/>
-              <a:t>12/02/2025</a:t>
+              <a:t>12/03/2025</a:t>
             </a:fld>
             <a:endParaRPr lang="LID4096"/>
           </a:p>
@@ -2569,7 +2569,7 @@
           <a:p>
             <a:fld id="{B4C93A37-6A61-4F10-A100-9676ACB86039}" type="datetime1">
               <a:rPr lang="LID4096" smtClean="0"/>
-              <a:t>12/02/2025</a:t>
+              <a:t>12/03/2025</a:t>
             </a:fld>
             <a:endParaRPr lang="LID4096"/>
           </a:p>
@@ -2682,7 +2682,7 @@
           <a:p>
             <a:fld id="{9E73F7F9-09CC-4C21-BDB8-90E2F1A013BD}" type="datetime1">
               <a:rPr lang="LID4096" smtClean="0"/>
-              <a:t>12/02/2025</a:t>
+              <a:t>12/03/2025</a:t>
             </a:fld>
             <a:endParaRPr lang="LID4096"/>
           </a:p>
@@ -2995,7 +2995,7 @@
           <a:p>
             <a:fld id="{FD166AE6-E2E5-4774-8434-34F2AD9BDDCE}" type="datetime1">
               <a:rPr lang="LID4096" smtClean="0"/>
-              <a:t>12/02/2025</a:t>
+              <a:t>12/03/2025</a:t>
             </a:fld>
             <a:endParaRPr lang="LID4096"/>
           </a:p>
@@ -3284,7 +3284,7 @@
           <a:p>
             <a:fld id="{895E2CCE-BBFE-4BEC-9002-70F26B158681}" type="datetime1">
               <a:rPr lang="LID4096" smtClean="0"/>
-              <a:t>12/02/2025</a:t>
+              <a:t>12/03/2025</a:t>
             </a:fld>
             <a:endParaRPr lang="LID4096"/>
           </a:p>
@@ -3527,7 +3527,7 @@
           <a:p>
             <a:fld id="{C795C0FD-7BB7-48C9-86F3-9771767F1BC3}" type="datetime1">
               <a:rPr lang="LID4096" smtClean="0"/>
-              <a:t>12/02/2025</a:t>
+              <a:t>12/03/2025</a:t>
             </a:fld>
             <a:endParaRPr lang="LID4096"/>
           </a:p>
@@ -4058,42 +4058,6 @@
       </p:sp>
       <p:pic>
         <p:nvPicPr>
-          <p:cNvPr id="5" name="Picture 4">
-            <a:extLst>
-              <a:ext uri="{FF2B5EF4-FFF2-40B4-BE49-F238E27FC236}">
-                <a16:creationId xmlns:a16="http://schemas.microsoft.com/office/drawing/2014/main" id="{728BE29A-27A3-AC41-EAC1-DA88C291BB39}"/>
-              </a:ext>
-            </a:extLst>
-          </p:cNvPr>
-          <p:cNvPicPr>
-            <a:picLocks noChangeAspect="1"/>
-          </p:cNvPicPr>
-          <p:nvPr/>
-        </p:nvPicPr>
-        <p:blipFill>
-          <a:blip r:embed="rId4">
-            <a:extLst>
-              <a:ext uri="{28A0092B-C50C-407E-A947-70E740481C1C}">
-                <a14:useLocalDpi xmlns:a14="http://schemas.microsoft.com/office/drawing/2010/main" val="0"/>
-              </a:ext>
-            </a:extLst>
-          </a:blip>
-          <a:stretch>
-            <a:fillRect/>
-          </a:stretch>
-        </p:blipFill>
-        <p:spPr>
-          <a:xfrm>
-            <a:off x="755576" y="710852"/>
-            <a:ext cx="2085975" cy="352425"/>
-          </a:xfrm>
-          <a:prstGeom prst="rect">
-            <a:avLst/>
-          </a:prstGeom>
-        </p:spPr>
-      </p:pic>
-      <p:pic>
-        <p:nvPicPr>
           <p:cNvPr id="6" name="Picture 4">
             <a:extLst>
               <a:ext uri="{FF2B5EF4-FFF2-40B4-BE49-F238E27FC236}">
@@ -4107,7 +4071,7 @@
           <p:nvPr/>
         </p:nvPicPr>
         <p:blipFill rotWithShape="1">
-          <a:blip r:embed="rId5" cstate="print">
+          <a:blip r:embed="rId4" cstate="print">
             <a:extLst>
               <a:ext uri="{28A0092B-C50C-407E-A947-70E740481C1C}">
                 <a14:useLocalDpi xmlns:a14="http://schemas.microsoft.com/office/drawing/2010/main" val="0"/>
@@ -4166,6 +4130,42 @@
           </a:p>
         </p:txBody>
       </p:sp>
+      <p:pic>
+        <p:nvPicPr>
+          <p:cNvPr id="8" name="Picture 7" descr="A black text on an orange background&#10;&#10;AI-generated content may be incorrect.">
+            <a:extLst>
+              <a:ext uri="{FF2B5EF4-FFF2-40B4-BE49-F238E27FC236}">
+                <a16:creationId xmlns:a16="http://schemas.microsoft.com/office/drawing/2014/main" id="{431F04A4-B182-7D9A-2216-19A7C3BB347A}"/>
+              </a:ext>
+            </a:extLst>
+          </p:cNvPr>
+          <p:cNvPicPr>
+            <a:picLocks noChangeAspect="1"/>
+          </p:cNvPicPr>
+          <p:nvPr/>
+        </p:nvPicPr>
+        <p:blipFill>
+          <a:blip r:embed="rId5">
+            <a:extLst>
+              <a:ext uri="{28A0092B-C50C-407E-A947-70E740481C1C}">
+                <a14:useLocalDpi xmlns:a14="http://schemas.microsoft.com/office/drawing/2010/main" val="0"/>
+              </a:ext>
+            </a:extLst>
+          </a:blip>
+          <a:stretch>
+            <a:fillRect/>
+          </a:stretch>
+        </p:blipFill>
+        <p:spPr>
+          <a:xfrm>
+            <a:off x="257891" y="511430"/>
+            <a:ext cx="3946238" cy="1531633"/>
+          </a:xfrm>
+          <a:prstGeom prst="rect">
+            <a:avLst/>
+          </a:prstGeom>
+        </p:spPr>
+      </p:pic>
     </p:spTree>
     <p:extLst>
       <p:ext uri="{BB962C8B-B14F-4D97-AF65-F5344CB8AC3E}">

--- a/mlops_on_hpc.pptx
+++ b/mlops_on_hpc.pptx
@@ -12878,8 +12878,8 @@
         </p:nvSpPr>
         <p:spPr>
           <a:xfrm>
-            <a:off x="6365318" y="5362347"/>
-            <a:ext cx="4988482" cy="461665"/>
+            <a:off x="5875460" y="5362347"/>
+            <a:ext cx="6094554" cy="461665"/>
           </a:xfrm>
           <a:prstGeom prst="rect">
             <a:avLst/>
@@ -12902,14 +12902,14 @@
                 <a:latin typeface="Courier New" panose="02070309020205020404" pitchFamily="49" charset="0"/>
                 <a:cs typeface="Courier New" panose="02070309020205020404" pitchFamily="49" charset="0"/>
               </a:rPr>
-              <a:t>dvc</a:t>
+              <a:t>Dvc</a:t>
             </a:r>
             <a:r>
               <a:rPr lang="en-US" sz="2400" dirty="0">
                 <a:latin typeface="Courier New" panose="02070309020205020404" pitchFamily="49" charset="0"/>
                 <a:cs typeface="Courier New" panose="02070309020205020404" pitchFamily="49" charset="0"/>
               </a:rPr>
-              <a:t> add</a:t>
+              <a:t> stage add</a:t>
             </a:r>
             <a:r>
               <a:rPr lang="en-US" sz="2400" dirty="0"/>
@@ -12951,7 +12951,7 @@
         <p:grpSpPr>
           <a:xfrm>
             <a:off x="2227559" y="4830010"/>
-            <a:ext cx="3988184" cy="821244"/>
+            <a:ext cx="3647901" cy="797904"/>
             <a:chOff x="2227559" y="4830010"/>
             <a:chExt cx="3988184" cy="821244"/>
           </a:xfrm>
@@ -15397,8 +15397,8 @@
         </p:nvSpPr>
         <p:spPr>
           <a:xfrm>
-            <a:off x="6365318" y="4905147"/>
-            <a:ext cx="5084084" cy="461665"/>
+            <a:off x="5690404" y="4905147"/>
+            <a:ext cx="6190156" cy="461665"/>
           </a:xfrm>
           <a:prstGeom prst="rect">
             <a:avLst/>
@@ -15428,7 +15428,7 @@
                 <a:latin typeface="Courier New" panose="02070309020205020404" pitchFamily="49" charset="0"/>
                 <a:cs typeface="Courier New" panose="02070309020205020404" pitchFamily="49" charset="0"/>
               </a:rPr>
-              <a:t> add</a:t>
+              <a:t> stage add</a:t>
             </a:r>
             <a:r>
               <a:rPr lang="en-US" sz="2400" dirty="0"/>
@@ -15469,8 +15469,8 @@
         </p:nvGrpSpPr>
         <p:grpSpPr>
           <a:xfrm>
-            <a:off x="2227559" y="4030026"/>
-            <a:ext cx="3988184" cy="1164027"/>
+            <a:off x="2227559" y="4030027"/>
+            <a:ext cx="3462845" cy="1137286"/>
             <a:chOff x="2227559" y="4487226"/>
             <a:chExt cx="3988184" cy="1164027"/>
           </a:xfrm>

--- a/mlops_on_hpc.pptx
+++ b/mlops_on_hpc.pptx
@@ -30682,8 +30682,8 @@
         </p:nvSpPr>
         <p:spPr>
           <a:xfrm>
-            <a:off x="1349828" y="2292717"/>
-            <a:ext cx="7260772" cy="369332"/>
+            <a:off x="1349827" y="2292717"/>
+            <a:ext cx="7663543" cy="369332"/>
           </a:xfrm>
           <a:prstGeom prst="rect">
             <a:avLst/>
@@ -30758,7 +30758,7 @@
         <p:spPr>
           <a:xfrm>
             <a:off x="1349827" y="3361450"/>
-            <a:ext cx="7260773" cy="369332"/>
+            <a:ext cx="7663544" cy="369332"/>
           </a:xfrm>
           <a:prstGeom prst="rect">
             <a:avLst/>
@@ -30806,7 +30806,7 @@
                 <a:latin typeface="Courier New" pitchFamily="49" charset="0"/>
                 <a:cs typeface="Courier New" pitchFamily="49" charset="0"/>
               </a:rPr>
-              <a:t> exp run  --queue  -set-param 'a=3.0,4.0,5.0'</a:t>
+              <a:t> exp run  --queue  -0set-param 'a=3.0,4.0,5.0'</a:t>
             </a:r>
             <a:endParaRPr lang="nl-BE" b="1" dirty="0">
               <a:solidFill>
@@ -30832,8 +30832,8 @@
         </p:nvSpPr>
         <p:spPr>
           <a:xfrm>
-            <a:off x="1349827" y="4354374"/>
-            <a:ext cx="7260772" cy="369332"/>
+            <a:off x="1349826" y="4354374"/>
+            <a:ext cx="7663543" cy="369332"/>
           </a:xfrm>
           <a:prstGeom prst="rect">
             <a:avLst/>

--- a/mlops_on_hpc.pptx
+++ b/mlops_on_hpc.pptx
@@ -441,7 +441,7 @@
           <a:p>
             <a:fld id="{8BC644CB-8FFF-4F59-B04D-9A1D2A5DB720}" type="datetimeFigureOut">
               <a:rPr lang="LID4096" smtClean="0"/>
-              <a:t>12/03/2025</a:t>
+              <a:t>02/04/2026</a:t>
             </a:fld>
             <a:endParaRPr lang="LID4096"/>
           </a:p>
@@ -858,7 +858,7 @@
           <a:p>
             <a:fld id="{29DC7A01-813B-4B59-A1CC-F2D63921E46A}" type="datetime1">
               <a:rPr lang="LID4096" smtClean="0"/>
-              <a:t>12/03/2025</a:t>
+              <a:t>02/04/2026</a:t>
             </a:fld>
             <a:endParaRPr lang="LID4096"/>
           </a:p>
@@ -1058,7 +1058,7 @@
           <a:p>
             <a:fld id="{6C2A7740-B6F2-4CC5-9AD0-B161B943DB10}" type="datetime1">
               <a:rPr lang="LID4096" smtClean="0"/>
-              <a:t>12/03/2025</a:t>
+              <a:t>02/04/2026</a:t>
             </a:fld>
             <a:endParaRPr lang="LID4096"/>
           </a:p>
@@ -1268,7 +1268,7 @@
           <a:p>
             <a:fld id="{2F94B025-8F26-4EDF-B991-413B82D6446E}" type="datetime1">
               <a:rPr lang="LID4096" smtClean="0"/>
-              <a:t>12/03/2025</a:t>
+              <a:t>02/04/2026</a:t>
             </a:fld>
             <a:endParaRPr lang="LID4096"/>
           </a:p>
@@ -1468,7 +1468,7 @@
           <a:p>
             <a:fld id="{CB5C8B8A-B2CE-4D78-88A4-476B2363B71E}" type="datetime1">
               <a:rPr lang="LID4096" smtClean="0"/>
-              <a:t>12/03/2025</a:t>
+              <a:t>02/04/2026</a:t>
             </a:fld>
             <a:endParaRPr lang="LID4096"/>
           </a:p>
@@ -1744,7 +1744,7 @@
           <a:p>
             <a:fld id="{CDDAB553-EE67-480E-BCE3-F64D7D51D294}" type="datetime1">
               <a:rPr lang="LID4096" smtClean="0"/>
-              <a:t>12/03/2025</a:t>
+              <a:t>02/04/2026</a:t>
             </a:fld>
             <a:endParaRPr lang="LID4096"/>
           </a:p>
@@ -2012,7 +2012,7 @@
           <a:p>
             <a:fld id="{CD270038-A599-4345-BE24-96A4E06BF8E3}" type="datetime1">
               <a:rPr lang="LID4096" smtClean="0"/>
-              <a:t>12/03/2025</a:t>
+              <a:t>02/04/2026</a:t>
             </a:fld>
             <a:endParaRPr lang="LID4096"/>
           </a:p>
@@ -2427,7 +2427,7 @@
           <a:p>
             <a:fld id="{44A719F7-59BE-4FD1-8AC5-F7BFCCA290D7}" type="datetime1">
               <a:rPr lang="LID4096" smtClean="0"/>
-              <a:t>12/03/2025</a:t>
+              <a:t>02/04/2026</a:t>
             </a:fld>
             <a:endParaRPr lang="LID4096"/>
           </a:p>
@@ -2569,7 +2569,7 @@
           <a:p>
             <a:fld id="{B4C93A37-6A61-4F10-A100-9676ACB86039}" type="datetime1">
               <a:rPr lang="LID4096" smtClean="0"/>
-              <a:t>12/03/2025</a:t>
+              <a:t>02/04/2026</a:t>
             </a:fld>
             <a:endParaRPr lang="LID4096"/>
           </a:p>
@@ -2682,7 +2682,7 @@
           <a:p>
             <a:fld id="{9E73F7F9-09CC-4C21-BDB8-90E2F1A013BD}" type="datetime1">
               <a:rPr lang="LID4096" smtClean="0"/>
-              <a:t>12/03/2025</a:t>
+              <a:t>02/04/2026</a:t>
             </a:fld>
             <a:endParaRPr lang="LID4096"/>
           </a:p>
@@ -2995,7 +2995,7 @@
           <a:p>
             <a:fld id="{FD166AE6-E2E5-4774-8434-34F2AD9BDDCE}" type="datetime1">
               <a:rPr lang="LID4096" smtClean="0"/>
-              <a:t>12/03/2025</a:t>
+              <a:t>02/04/2026</a:t>
             </a:fld>
             <a:endParaRPr lang="LID4096"/>
           </a:p>
@@ -3284,7 +3284,7 @@
           <a:p>
             <a:fld id="{895E2CCE-BBFE-4BEC-9002-70F26B158681}" type="datetime1">
               <a:rPr lang="LID4096" smtClean="0"/>
-              <a:t>12/03/2025</a:t>
+              <a:t>02/04/2026</a:t>
             </a:fld>
             <a:endParaRPr lang="LID4096"/>
           </a:p>
@@ -3527,7 +3527,7 @@
           <a:p>
             <a:fld id="{C795C0FD-7BB7-48C9-86F3-9771767F1BC3}" type="datetime1">
               <a:rPr lang="LID4096" smtClean="0"/>
-              <a:t>12/03/2025</a:t>
+              <a:t>02/04/2026</a:t>
             </a:fld>
             <a:endParaRPr lang="LID4096"/>
           </a:p>
@@ -19169,8 +19169,8 @@
         </p:nvSpPr>
         <p:spPr>
           <a:xfrm>
-            <a:off x="1578429" y="5646154"/>
-            <a:ext cx="8600624" cy="954107"/>
+            <a:off x="838200" y="5646154"/>
+            <a:ext cx="9889439" cy="954107"/>
           </a:xfrm>
           <a:prstGeom prst="rect">
             <a:avLst/>
@@ -19204,7 +19204,7 @@
                 <a:latin typeface="Courier New" panose="02070309020205020404" pitchFamily="49" charset="0"/>
                 <a:cs typeface="Courier New" panose="02070309020205020404" pitchFamily="49" charset="0"/>
               </a:rPr>
-              <a:t> add --force </a:t>
+              <a:t> stage add --force </a:t>
             </a:r>
             <a:r>
               <a:rPr lang="en-US" sz="2800" dirty="0">
